--- a/factory-agent-demo.pptx
+++ b/factory-agent-demo.pptx
@@ -1494,8 +1494,8 @@
         </p:nvSpPr>
         <p:spPr>
           <a:xfrm>
-            <a:off x="4480560" y="1097280"/>
-            <a:ext cx="1554480" cy="1325880"/>
+            <a:off x="4617720" y="1234440"/>
+            <a:ext cx="1417320" cy="1097280"/>
           </a:xfrm>
           <a:prstGeom prst="roundRect">
             <a:avLst>
@@ -1525,8 +1525,8 @@
         </p:nvSpPr>
         <p:spPr>
           <a:xfrm>
-            <a:off x="4480560" y="1097280"/>
-            <a:ext cx="1554480" cy="438912"/>
+            <a:off x="4617720" y="1234440"/>
+            <a:ext cx="1417320" cy="329184"/>
           </a:xfrm>
           <a:prstGeom prst="rect">
             <a:avLst/>
@@ -1564,8 +1564,8 @@
         </p:nvSpPr>
         <p:spPr>
           <a:xfrm>
-            <a:off x="4572000" y="1572768"/>
-            <a:ext cx="1371600" cy="502920"/>
+            <a:off x="4709160" y="1581912"/>
+            <a:ext cx="1234440" cy="402336"/>
           </a:xfrm>
           <a:prstGeom prst="rect">
             <a:avLst/>
@@ -1581,7 +1581,7 @@
               <a:buNone/>
             </a:pPr>
             <a:r>
-              <a:rPr lang="en-US" sz="850" dirty="0">
+              <a:rPr lang="en-US" sz="800" b="0" i="0" dirty="0">
                 <a:solidFill>
                   <a:srgbClr val="3D5E80"/>
                 </a:solidFill>
@@ -1589,16 +1589,38 @@
                 <a:ea typeface="Calibri" pitchFamily="34" charset="-122"/>
                 <a:cs typeface="Calibri" pitchFamily="34" charset="-120"/>
               </a:rPr>
-              <a:t>Hosted or public models</a:t>
-            </a:r>
-            <a:endParaRPr lang="en-US" sz="850" dirty="0"/>
-          </a:p>
+              <a:t>Secured access to local or frontier models</a:t>
+            </a:r>
+            <a:endParaRPr lang="en-US"/>
+          </a:p>
+        </p:txBody>
+      </p:sp>
+      <p:sp>
+        <p:nvSpPr>
+          <p:cNvPr id="21" name="Text 19"/>
+          <p:cNvSpPr/>
+          <p:nvPr/>
+        </p:nvSpPr>
+        <p:spPr>
+          <a:xfrm>
+            <a:off x="4709160" y="1984248"/>
+            <a:ext cx="1234440" cy="301752"/>
+          </a:xfrm>
+          <a:prstGeom prst="rect">
+            <a:avLst/>
+          </a:prstGeom>
+          <a:noFill/>
+          <a:ln/>
+        </p:spPr>
+        <p:txBody>
+          <a:bodyPr wrap="square" rtlCol="0" anchor="t"/>
+          <a:lstStyle/>
           <a:p>
             <a:pPr algn="ctr" indent="0" marL="0">
               <a:buNone/>
             </a:pPr>
             <a:r>
-              <a:rPr lang="en-US" sz="850" dirty="0">
+              <a:rPr lang="en-US" sz="700" b="0" i="1" dirty="0">
                 <a:solidFill>
                   <a:srgbClr val="3D5E80"/>
                 </a:solidFill>
@@ -1606,38 +1628,10 @@
                 <a:ea typeface="Calibri" pitchFamily="34" charset="-122"/>
                 <a:cs typeface="Calibri" pitchFamily="34" charset="-120"/>
               </a:rPr>
-              <a:t>secure access</a:t>
-            </a:r>
-            <a:endParaRPr lang="en-US" sz="850" dirty="0"/>
-          </a:p>
-        </p:txBody>
-      </p:sp>
-      <p:sp>
-        <p:nvSpPr>
-          <p:cNvPr id="21" name="Text 19"/>
-          <p:cNvSpPr/>
-          <p:nvPr/>
-        </p:nvSpPr>
-        <p:spPr>
-          <a:xfrm>
-            <a:off x="4572000" y="2075688"/>
-            <a:ext cx="1371600" cy="301752"/>
-          </a:xfrm>
-          <a:prstGeom prst="rect">
-            <a:avLst/>
-          </a:prstGeom>
-          <a:noFill/>
-          <a:ln/>
-        </p:spPr>
-        <p:txBody>
-          <a:bodyPr wrap="square" rtlCol="0" anchor="t"/>
-          <a:lstStyle/>
-          <a:p>
-            <a:pPr algn="ctr" indent="0" marL="0">
-              <a:buNone/>
-            </a:pPr>
-            <a:r>
-              <a:rPr lang="en-US" sz="750" i="1" dirty="0">
+              <a:t>Catalog of pre-authorized,</a:t>
+            </a:r>
+            <a:br>
+              <a:rPr lang="en-US" sz="700" b="0" i="1" dirty="0">
                 <a:solidFill>
                   <a:srgbClr val="3D5E80"/>
                 </a:solidFill>
@@ -1645,16 +1639,9 @@
                 <a:ea typeface="Calibri" pitchFamily="34" charset="-122"/>
                 <a:cs typeface="Calibri" pitchFamily="34" charset="-120"/>
               </a:rPr>
-              <a:t>gpt-4o / claude-3-5</a:t>
-            </a:r>
-            <a:endParaRPr lang="en-US" sz="750" dirty="0"/>
-          </a:p>
-          <a:p>
-            <a:pPr algn="ctr" indent="0" marL="0">
-              <a:buNone/>
-            </a:pPr>
-            <a:r>
-              <a:rPr lang="en-US" sz="750" i="1" dirty="0">
+            </a:br>
+            <a:r>
+              <a:rPr lang="en-US" sz="700" b="0" i="1" dirty="0">
                 <a:solidFill>
                   <a:srgbClr val="3D5E80"/>
                 </a:solidFill>
@@ -1662,9 +1649,9 @@
                 <a:ea typeface="Calibri" pitchFamily="34" charset="-122"/>
                 <a:cs typeface="Calibri" pitchFamily="34" charset="-120"/>
               </a:rPr>
-              <a:t>Sonnet / tools-capable</a:t>
-            </a:r>
-            <a:endParaRPr lang="en-US" sz="750" dirty="0"/>
+              <a:t>on-demand services</a:t>
+            </a:r>
+            <a:endParaRPr lang="en-US"/>
           </a:p>
         </p:txBody>
       </p:sp>
@@ -1677,7 +1664,7 @@
         <p:spPr>
           <a:xfrm>
             <a:off x="4069080" y="1737360"/>
-            <a:ext cx="411480" cy="0"/>
+            <a:ext cx="548640" cy="0"/>
           </a:xfrm>
           <a:prstGeom prst="line">
             <a:avLst/>
@@ -1940,8 +1927,8 @@
         </p:nvSpPr>
         <p:spPr>
           <a:xfrm>
-            <a:off x="2880360" y="932688"/>
-            <a:ext cx="0" cy="164592"/>
+            <a:off x="2880360" y="1051560"/>
+            <a:ext cx="0" cy="45720"/>
           </a:xfrm>
           <a:prstGeom prst="line">
             <a:avLst/>
@@ -1967,7 +1954,7 @@
         </p:nvSpPr>
         <p:spPr>
           <a:xfrm>
-            <a:off x="2880360" y="932688"/>
+            <a:off x="2880360" y="1051560"/>
             <a:ext cx="4480560" cy="0"/>
           </a:xfrm>
           <a:prstGeom prst="line">
@@ -1994,8 +1981,8 @@
         </p:nvSpPr>
         <p:spPr>
           <a:xfrm>
-            <a:off x="7360920" y="932688"/>
-            <a:ext cx="0" cy="347472"/>
+            <a:off x="7360920" y="1051560"/>
+            <a:ext cx="0" cy="228600"/>
           </a:xfrm>
           <a:prstGeom prst="line">
             <a:avLst/>
@@ -3071,7 +3058,7 @@
         </p:nvSpPr>
         <p:spPr>
           <a:xfrm>
-            <a:off x="5175504" y="758952"/>
+            <a:off x="5084064" y="941832"/>
             <a:ext cx="3474720" cy="146304"/>
           </a:xfrm>
           <a:prstGeom prst="rect">
